--- a/4.pptx
+++ b/4.pptx
@@ -19,6 +19,7 @@
     <p:sldId id="267" r:id="rId13"/>
     <p:sldId id="268" r:id="rId14"/>
     <p:sldId id="269" r:id="rId15"/>
+    <p:sldId id="270" r:id="rId16"/>
   </p:sldIdLst>
   <p:sldSz cx="9144000" cy="6858000" type="screen4x3"/>
   <p:notesSz cx="6858000" cy="9144000"/>
@@ -301,7 +302,7 @@
           <a:p>
             <a:fld id="{3A488498-6BE3-4B85-A51A-914F2A51E9D6}" type="datetimeFigureOut">
               <a:rPr lang="en-GB" smtClean="0"/>
-              <a:t>28/10/2025</a:t>
+              <a:t>04/11/2025</a:t>
             </a:fld>
             <a:endParaRPr lang="en-GB"/>
           </a:p>
@@ -471,7 +472,7 @@
           <a:p>
             <a:fld id="{3A488498-6BE3-4B85-A51A-914F2A51E9D6}" type="datetimeFigureOut">
               <a:rPr lang="en-GB" smtClean="0"/>
-              <a:t>28/10/2025</a:t>
+              <a:t>04/11/2025</a:t>
             </a:fld>
             <a:endParaRPr lang="en-GB"/>
           </a:p>
@@ -651,7 +652,7 @@
           <a:p>
             <a:fld id="{3A488498-6BE3-4B85-A51A-914F2A51E9D6}" type="datetimeFigureOut">
               <a:rPr lang="en-GB" smtClean="0"/>
-              <a:t>28/10/2025</a:t>
+              <a:t>04/11/2025</a:t>
             </a:fld>
             <a:endParaRPr lang="en-GB"/>
           </a:p>
@@ -821,7 +822,7 @@
           <a:p>
             <a:fld id="{3A488498-6BE3-4B85-A51A-914F2A51E9D6}" type="datetimeFigureOut">
               <a:rPr lang="en-GB" smtClean="0"/>
-              <a:t>28/10/2025</a:t>
+              <a:t>04/11/2025</a:t>
             </a:fld>
             <a:endParaRPr lang="en-GB"/>
           </a:p>
@@ -1067,7 +1068,7 @@
           <a:p>
             <a:fld id="{3A488498-6BE3-4B85-A51A-914F2A51E9D6}" type="datetimeFigureOut">
               <a:rPr lang="en-GB" smtClean="0"/>
-              <a:t>28/10/2025</a:t>
+              <a:t>04/11/2025</a:t>
             </a:fld>
             <a:endParaRPr lang="en-GB"/>
           </a:p>
@@ -1355,7 +1356,7 @@
           <a:p>
             <a:fld id="{3A488498-6BE3-4B85-A51A-914F2A51E9D6}" type="datetimeFigureOut">
               <a:rPr lang="en-GB" smtClean="0"/>
-              <a:t>28/10/2025</a:t>
+              <a:t>04/11/2025</a:t>
             </a:fld>
             <a:endParaRPr lang="en-GB"/>
           </a:p>
@@ -1777,7 +1778,7 @@
           <a:p>
             <a:fld id="{3A488498-6BE3-4B85-A51A-914F2A51E9D6}" type="datetimeFigureOut">
               <a:rPr lang="en-GB" smtClean="0"/>
-              <a:t>28/10/2025</a:t>
+              <a:t>04/11/2025</a:t>
             </a:fld>
             <a:endParaRPr lang="en-GB"/>
           </a:p>
@@ -1895,7 +1896,7 @@
           <a:p>
             <a:fld id="{3A488498-6BE3-4B85-A51A-914F2A51E9D6}" type="datetimeFigureOut">
               <a:rPr lang="en-GB" smtClean="0"/>
-              <a:t>28/10/2025</a:t>
+              <a:t>04/11/2025</a:t>
             </a:fld>
             <a:endParaRPr lang="en-GB"/>
           </a:p>
@@ -1990,7 +1991,7 @@
           <a:p>
             <a:fld id="{3A488498-6BE3-4B85-A51A-914F2A51E9D6}" type="datetimeFigureOut">
               <a:rPr lang="en-GB" smtClean="0"/>
-              <a:t>28/10/2025</a:t>
+              <a:t>04/11/2025</a:t>
             </a:fld>
             <a:endParaRPr lang="en-GB"/>
           </a:p>
@@ -2267,7 +2268,7 @@
           <a:p>
             <a:fld id="{3A488498-6BE3-4B85-A51A-914F2A51E9D6}" type="datetimeFigureOut">
               <a:rPr lang="en-GB" smtClean="0"/>
-              <a:t>28/10/2025</a:t>
+              <a:t>04/11/2025</a:t>
             </a:fld>
             <a:endParaRPr lang="en-GB"/>
           </a:p>
@@ -2520,7 +2521,7 @@
           <a:p>
             <a:fld id="{3A488498-6BE3-4B85-A51A-914F2A51E9D6}" type="datetimeFigureOut">
               <a:rPr lang="en-GB" smtClean="0"/>
-              <a:t>28/10/2025</a:t>
+              <a:t>04/11/2025</a:t>
             </a:fld>
             <a:endParaRPr lang="en-GB"/>
           </a:p>
@@ -2733,7 +2734,7 @@
           <a:p>
             <a:fld id="{3A488498-6BE3-4B85-A51A-914F2A51E9D6}" type="datetimeFigureOut">
               <a:rPr lang="en-GB" smtClean="0"/>
-              <a:t>28/10/2025</a:t>
+              <a:t>04/11/2025</a:t>
             </a:fld>
             <a:endParaRPr lang="en-GB"/>
           </a:p>
@@ -4107,134 +4108,6 @@
           <a:p>
             <a:pPr lvl="1"/>
             <a:r>
-              <a:rPr lang="hu-HU" dirty="0" err="1" smtClean="0"/>
-              <a:t>various</a:t>
-            </a:r>
-            <a:r>
-              <a:rPr lang="hu-HU" dirty="0" smtClean="0"/>
-              <a:t> </a:t>
-            </a:r>
-            <a:r>
-              <a:rPr lang="hu-HU" dirty="0" err="1" smtClean="0"/>
-              <a:t>statistical</a:t>
-            </a:r>
-            <a:r>
-              <a:rPr lang="hu-HU" dirty="0" smtClean="0"/>
-              <a:t> </a:t>
-            </a:r>
-            <a:r>
-              <a:rPr lang="hu-HU" dirty="0" err="1" smtClean="0"/>
-              <a:t>measures</a:t>
-            </a:r>
-            <a:r>
-              <a:rPr lang="hu-HU" dirty="0" smtClean="0"/>
-              <a:t> </a:t>
-            </a:r>
-            <a:r>
-              <a:rPr lang="hu-HU" dirty="0" err="1" smtClean="0"/>
-              <a:t>can</a:t>
-            </a:r>
-            <a:r>
-              <a:rPr lang="hu-HU" dirty="0" smtClean="0"/>
-              <a:t> be </a:t>
-            </a:r>
-            <a:r>
-              <a:rPr lang="hu-HU" dirty="0" err="1" smtClean="0"/>
-              <a:t>used</a:t>
-            </a:r>
-            <a:r>
-              <a:rPr lang="hu-HU" dirty="0" smtClean="0"/>
-              <a:t> </a:t>
-            </a:r>
-            <a:r>
-              <a:rPr lang="hu-HU" dirty="0" err="1" smtClean="0"/>
-              <a:t>to</a:t>
-            </a:r>
-            <a:r>
-              <a:rPr lang="hu-HU" dirty="0" smtClean="0"/>
-              <a:t> </a:t>
-            </a:r>
-            <a:r>
-              <a:rPr lang="hu-HU" dirty="0" err="1" smtClean="0"/>
-              <a:t>quantify</a:t>
-            </a:r>
-            <a:r>
-              <a:rPr lang="hu-HU" dirty="0" smtClean="0"/>
-              <a:t> </a:t>
-            </a:r>
-            <a:r>
-              <a:rPr lang="hu-HU" dirty="0" err="1" smtClean="0"/>
-              <a:t>the</a:t>
-            </a:r>
-            <a:r>
-              <a:rPr lang="hu-HU" dirty="0" smtClean="0"/>
-              <a:t> </a:t>
-            </a:r>
-            <a:r>
-              <a:rPr lang="hu-HU" dirty="0" err="1" smtClean="0"/>
-              <a:t>strength</a:t>
-            </a:r>
-            <a:r>
-              <a:rPr lang="hu-HU" dirty="0" smtClean="0"/>
-              <a:t> of a </a:t>
-            </a:r>
-            <a:r>
-              <a:rPr lang="hu-HU" dirty="0" err="1" smtClean="0"/>
-              <a:t>collocation</a:t>
-            </a:r>
-            <a:endParaRPr lang="hu-HU" dirty="0" smtClean="0"/>
-          </a:p>
-          <a:p>
-            <a:pPr lvl="2"/>
-            <a:r>
-              <a:rPr lang="hu-HU" dirty="0" err="1" smtClean="0"/>
-              <a:t>Sketch</a:t>
-            </a:r>
-            <a:r>
-              <a:rPr lang="hu-HU" dirty="0" smtClean="0"/>
-              <a:t> </a:t>
-            </a:r>
-            <a:r>
-              <a:rPr lang="hu-HU" dirty="0" err="1" smtClean="0"/>
-              <a:t>Engine</a:t>
-            </a:r>
-            <a:r>
-              <a:rPr lang="hu-HU" dirty="0" smtClean="0"/>
-              <a:t>: </a:t>
-            </a:r>
-            <a:r>
-              <a:rPr lang="hu-HU" dirty="0" err="1" smtClean="0"/>
-              <a:t>T-score</a:t>
-            </a:r>
-            <a:r>
-              <a:rPr lang="hu-HU" dirty="0" smtClean="0"/>
-              <a:t>, </a:t>
-            </a:r>
-            <a:r>
-              <a:rPr lang="hu-HU" dirty="0" err="1" smtClean="0"/>
-              <a:t>mutual</a:t>
-            </a:r>
-            <a:r>
-              <a:rPr lang="hu-HU" dirty="0" smtClean="0"/>
-              <a:t> </a:t>
-            </a:r>
-            <a:r>
-              <a:rPr lang="hu-HU" dirty="0" err="1" smtClean="0"/>
-              <a:t>information</a:t>
-            </a:r>
-            <a:r>
-              <a:rPr lang="hu-HU" dirty="0" smtClean="0"/>
-              <a:t> (MI), </a:t>
-            </a:r>
-            <a:r>
-              <a:rPr lang="hu-HU" dirty="0" err="1" smtClean="0"/>
-              <a:t>LogDice</a:t>
-            </a:r>
-            <a:endParaRPr lang="hu-HU" dirty="0" smtClean="0"/>
-          </a:p>
-          <a:p>
-            <a:pPr lvl="1"/>
-            <a:r>
               <a:rPr lang="hu-HU" i="1" dirty="0" smtClean="0"/>
               <a:t>more </a:t>
             </a:r>
@@ -4465,6 +4338,134 @@
             <a:r>
               <a:rPr lang="hu-HU" dirty="0" err="1" smtClean="0"/>
               <a:t>words</a:t>
+            </a:r>
+            <a:endParaRPr lang="hu-HU" dirty="0" smtClean="0"/>
+          </a:p>
+          <a:p>
+            <a:pPr lvl="2"/>
+            <a:r>
+              <a:rPr lang="hu-HU" dirty="0" err="1"/>
+              <a:t>various</a:t>
+            </a:r>
+            <a:r>
+              <a:rPr lang="hu-HU" dirty="0"/>
+              <a:t> </a:t>
+            </a:r>
+            <a:r>
+              <a:rPr lang="hu-HU" dirty="0" err="1"/>
+              <a:t>statistical</a:t>
+            </a:r>
+            <a:r>
+              <a:rPr lang="hu-HU" dirty="0"/>
+              <a:t> </a:t>
+            </a:r>
+            <a:r>
+              <a:rPr lang="hu-HU" dirty="0" err="1"/>
+              <a:t>measures</a:t>
+            </a:r>
+            <a:r>
+              <a:rPr lang="hu-HU" dirty="0"/>
+              <a:t> </a:t>
+            </a:r>
+            <a:r>
+              <a:rPr lang="hu-HU" dirty="0" err="1"/>
+              <a:t>can</a:t>
+            </a:r>
+            <a:r>
+              <a:rPr lang="hu-HU" dirty="0"/>
+              <a:t> be </a:t>
+            </a:r>
+            <a:r>
+              <a:rPr lang="hu-HU" dirty="0" err="1"/>
+              <a:t>used</a:t>
+            </a:r>
+            <a:r>
+              <a:rPr lang="hu-HU" dirty="0"/>
+              <a:t> </a:t>
+            </a:r>
+            <a:r>
+              <a:rPr lang="hu-HU" dirty="0" err="1"/>
+              <a:t>to</a:t>
+            </a:r>
+            <a:r>
+              <a:rPr lang="hu-HU" dirty="0"/>
+              <a:t> </a:t>
+            </a:r>
+            <a:r>
+              <a:rPr lang="hu-HU" dirty="0" err="1"/>
+              <a:t>quantify</a:t>
+            </a:r>
+            <a:r>
+              <a:rPr lang="hu-HU" dirty="0"/>
+              <a:t> </a:t>
+            </a:r>
+            <a:r>
+              <a:rPr lang="hu-HU" dirty="0" err="1"/>
+              <a:t>the</a:t>
+            </a:r>
+            <a:r>
+              <a:rPr lang="hu-HU" dirty="0"/>
+              <a:t> </a:t>
+            </a:r>
+            <a:r>
+              <a:rPr lang="hu-HU" dirty="0" err="1"/>
+              <a:t>strength</a:t>
+            </a:r>
+            <a:r>
+              <a:rPr lang="hu-HU" dirty="0"/>
+              <a:t> of a </a:t>
+            </a:r>
+            <a:r>
+              <a:rPr lang="hu-HU" dirty="0" err="1"/>
+              <a:t>collocation</a:t>
+            </a:r>
+            <a:endParaRPr lang="hu-HU" dirty="0"/>
+          </a:p>
+          <a:p>
+            <a:pPr lvl="3"/>
+            <a:r>
+              <a:rPr lang="hu-HU" dirty="0" err="1"/>
+              <a:t>Sketch</a:t>
+            </a:r>
+            <a:r>
+              <a:rPr lang="hu-HU" dirty="0"/>
+              <a:t> </a:t>
+            </a:r>
+            <a:r>
+              <a:rPr lang="hu-HU" dirty="0" err="1"/>
+              <a:t>Engine</a:t>
+            </a:r>
+            <a:r>
+              <a:rPr lang="hu-HU" dirty="0"/>
+              <a:t>: </a:t>
+            </a:r>
+            <a:r>
+              <a:rPr lang="hu-HU" dirty="0" err="1"/>
+              <a:t>T-score</a:t>
+            </a:r>
+            <a:r>
+              <a:rPr lang="hu-HU" dirty="0"/>
+              <a:t>, </a:t>
+            </a:r>
+            <a:r>
+              <a:rPr lang="hu-HU" dirty="0" err="1"/>
+              <a:t>mutual</a:t>
+            </a:r>
+            <a:r>
+              <a:rPr lang="hu-HU" dirty="0"/>
+              <a:t> </a:t>
+            </a:r>
+            <a:r>
+              <a:rPr lang="hu-HU" dirty="0" err="1"/>
+              <a:t>information</a:t>
+            </a:r>
+            <a:r>
+              <a:rPr lang="hu-HU" dirty="0"/>
+              <a:t> (MI), </a:t>
+            </a:r>
+            <a:r>
+              <a:rPr lang="hu-HU" dirty="0" err="1" smtClean="0"/>
+              <a:t>LogDice</a:t>
             </a:r>
             <a:endParaRPr lang="hu-HU" dirty="0" smtClean="0"/>
           </a:p>
@@ -7285,10 +7286,6 @@
               </a:rPr>
               <a:t>]{2,3}</a:t>
             </a:r>
-            <a:endParaRPr lang="hu-HU" sz="2600" dirty="0" smtClean="0">
-              <a:latin typeface="Courier New" panose="02070309020205020404" pitchFamily="49" charset="0"/>
-              <a:cs typeface="Courier New" panose="02070309020205020404" pitchFamily="49" charset="0"/>
-            </a:endParaRPr>
           </a:p>
         </p:txBody>
       </p:sp>
@@ -7309,6 +7306,486 @@
       </p:par>
     </p:tnLst>
   </p:timing>
+</p:sld>
+</file>
+
+<file path=ppt/slides/slide15.xml><?xml version="1.0" encoding="utf-8"?>
+<p:sld xmlns:a="http://schemas.openxmlformats.org/drawingml/2006/main" xmlns:r="http://schemas.openxmlformats.org/officeDocument/2006/relationships" xmlns:p="http://schemas.openxmlformats.org/presentationml/2006/main">
+  <p:cSld>
+    <p:spTree>
+      <p:nvGrpSpPr>
+        <p:cNvPr id="1" name=""/>
+        <p:cNvGrpSpPr/>
+        <p:nvPr/>
+      </p:nvGrpSpPr>
+      <p:grpSpPr>
+        <a:xfrm>
+          <a:off x="0" y="0"/>
+          <a:ext cx="0" cy="0"/>
+          <a:chOff x="0" y="0"/>
+          <a:chExt cx="0" cy="0"/>
+        </a:xfrm>
+      </p:grpSpPr>
+      <p:sp>
+        <p:nvSpPr>
+          <p:cNvPr id="2" name="Cím 1"/>
+          <p:cNvSpPr>
+            <a:spLocks noGrp="1"/>
+          </p:cNvSpPr>
+          <p:nvPr>
+            <p:ph type="title"/>
+          </p:nvPr>
+        </p:nvSpPr>
+        <p:spPr/>
+        <p:txBody>
+          <a:bodyPr/>
+          <a:lstStyle/>
+          <a:p>
+            <a:r>
+              <a:rPr lang="hu-HU" dirty="0" err="1" smtClean="0"/>
+              <a:t>CQL</a:t>
+            </a:r>
+            <a:endParaRPr lang="en-GB" dirty="0"/>
+          </a:p>
+        </p:txBody>
+      </p:sp>
+      <p:sp>
+        <p:nvSpPr>
+          <p:cNvPr id="3" name="Tartalom helye 2"/>
+          <p:cNvSpPr>
+            <a:spLocks noGrp="1"/>
+          </p:cNvSpPr>
+          <p:nvPr>
+            <p:ph idx="1"/>
+          </p:nvPr>
+        </p:nvSpPr>
+        <p:spPr/>
+        <p:txBody>
+          <a:bodyPr>
+            <a:normAutofit fontScale="92500" lnSpcReduction="20000"/>
+          </a:bodyPr>
+          <a:lstStyle/>
+          <a:p>
+            <a:r>
+              <a:rPr lang="hu-HU" dirty="0" err="1" smtClean="0"/>
+              <a:t>Some</a:t>
+            </a:r>
+            <a:r>
+              <a:rPr lang="hu-HU" dirty="0" smtClean="0"/>
+              <a:t> </a:t>
+            </a:r>
+            <a:r>
+              <a:rPr lang="hu-HU" dirty="0" err="1" smtClean="0"/>
+              <a:t>example</a:t>
+            </a:r>
+            <a:r>
+              <a:rPr lang="hu-HU" dirty="0" smtClean="0"/>
+              <a:t> </a:t>
+            </a:r>
+            <a:r>
+              <a:rPr lang="hu-HU" dirty="0" err="1" smtClean="0"/>
+              <a:t>searches</a:t>
+            </a:r>
+            <a:r>
+              <a:rPr lang="hu-HU" dirty="0" smtClean="0"/>
+              <a:t>:</a:t>
+            </a:r>
+          </a:p>
+          <a:p>
+            <a:pPr lvl="1"/>
+            <a:r>
+              <a:rPr lang="hu-HU" dirty="0" err="1" smtClean="0"/>
+              <a:t>noun-noun</a:t>
+            </a:r>
+            <a:r>
+              <a:rPr lang="hu-HU" dirty="0" smtClean="0"/>
+              <a:t> </a:t>
+            </a:r>
+            <a:r>
+              <a:rPr lang="hu-HU" dirty="0" err="1" smtClean="0"/>
+              <a:t>compounds</a:t>
+            </a:r>
+            <a:r>
+              <a:rPr lang="hu-HU" dirty="0" smtClean="0"/>
+              <a:t>, </a:t>
+            </a:r>
+            <a:r>
+              <a:rPr lang="hu-HU" dirty="0" err="1" smtClean="0"/>
+              <a:t>whether</a:t>
+            </a:r>
+            <a:r>
+              <a:rPr lang="hu-HU" dirty="0" smtClean="0"/>
+              <a:t> </a:t>
+            </a:r>
+            <a:r>
+              <a:rPr lang="hu-HU" dirty="0" err="1" smtClean="0"/>
+              <a:t>hyphenated</a:t>
+            </a:r>
+            <a:r>
+              <a:rPr lang="hu-HU" dirty="0" smtClean="0"/>
+              <a:t> </a:t>
+            </a:r>
+            <a:r>
+              <a:rPr lang="hu-HU" dirty="0" err="1" smtClean="0"/>
+              <a:t>or</a:t>
+            </a:r>
+            <a:r>
+              <a:rPr lang="hu-HU" dirty="0" smtClean="0"/>
+              <a:t> </a:t>
+            </a:r>
+            <a:r>
+              <a:rPr lang="hu-HU" dirty="0" err="1" smtClean="0"/>
+              <a:t>not</a:t>
+            </a:r>
+            <a:endParaRPr lang="hu-HU" dirty="0" smtClean="0"/>
+          </a:p>
+          <a:p>
+            <a:pPr lvl="1"/>
+            <a:r>
+              <a:rPr lang="hu-HU" dirty="0" err="1" smtClean="0"/>
+              <a:t>sequences</a:t>
+            </a:r>
+            <a:r>
+              <a:rPr lang="hu-HU" dirty="0" smtClean="0"/>
+              <a:t> </a:t>
+            </a:r>
+            <a:r>
+              <a:rPr lang="hu-HU" dirty="0"/>
+              <a:t>of </a:t>
+            </a:r>
+            <a:r>
+              <a:rPr lang="hu-HU" dirty="0" err="1"/>
+              <a:t>two</a:t>
+            </a:r>
+            <a:r>
+              <a:rPr lang="hu-HU" dirty="0"/>
+              <a:t> </a:t>
+            </a:r>
+            <a:r>
+              <a:rPr lang="hu-HU" dirty="0" err="1"/>
+              <a:t>or</a:t>
+            </a:r>
+            <a:r>
+              <a:rPr lang="hu-HU" dirty="0"/>
+              <a:t> more </a:t>
+            </a:r>
+            <a:r>
+              <a:rPr lang="hu-HU" dirty="0" err="1"/>
+              <a:t>adjectives</a:t>
+            </a:r>
+            <a:endParaRPr lang="en-GB" dirty="0"/>
+          </a:p>
+          <a:p>
+            <a:pPr lvl="1"/>
+            <a:r>
+              <a:rPr lang="hu-HU" dirty="0" err="1" smtClean="0"/>
+              <a:t>phrasal</a:t>
+            </a:r>
+            <a:r>
+              <a:rPr lang="hu-HU" dirty="0" smtClean="0"/>
+              <a:t> </a:t>
+            </a:r>
+            <a:r>
+              <a:rPr lang="hu-HU" dirty="0" err="1" smtClean="0"/>
+              <a:t>verbs</a:t>
+            </a:r>
+            <a:r>
+              <a:rPr lang="hu-HU" dirty="0" smtClean="0"/>
+              <a:t>, </a:t>
+            </a:r>
+            <a:r>
+              <a:rPr lang="hu-HU" dirty="0" err="1" smtClean="0"/>
+              <a:t>like</a:t>
+            </a:r>
+            <a:r>
+              <a:rPr lang="hu-HU" dirty="0" smtClean="0"/>
+              <a:t> </a:t>
+            </a:r>
+            <a:r>
+              <a:rPr lang="hu-HU" i="1" dirty="0" err="1" smtClean="0"/>
+              <a:t>carry</a:t>
+            </a:r>
+            <a:r>
+              <a:rPr lang="hu-HU" i="1" dirty="0" smtClean="0"/>
+              <a:t> out, </a:t>
+            </a:r>
+            <a:r>
+              <a:rPr lang="hu-HU" i="1" dirty="0" err="1" smtClean="0"/>
+              <a:t>wake</a:t>
+            </a:r>
+            <a:r>
+              <a:rPr lang="hu-HU" i="1" dirty="0" smtClean="0"/>
+              <a:t> </a:t>
+            </a:r>
+            <a:r>
+              <a:rPr lang="hu-HU" i="1" dirty="0" err="1" smtClean="0"/>
+              <a:t>up</a:t>
+            </a:r>
+            <a:r>
+              <a:rPr lang="hu-HU" i="1" dirty="0" smtClean="0"/>
+              <a:t>,</a:t>
+            </a:r>
+            <a:r>
+              <a:rPr lang="hu-HU" dirty="0" smtClean="0"/>
+              <a:t> etc.</a:t>
+            </a:r>
+          </a:p>
+          <a:p>
+            <a:pPr lvl="1"/>
+            <a:r>
+              <a:rPr lang="hu-HU" dirty="0" err="1" smtClean="0"/>
+              <a:t>occurrences</a:t>
+            </a:r>
+            <a:r>
+              <a:rPr lang="hu-HU" dirty="0" smtClean="0"/>
+              <a:t> of </a:t>
+            </a:r>
+            <a:r>
+              <a:rPr lang="hu-HU" i="1" dirty="0" err="1" smtClean="0"/>
+              <a:t>that</a:t>
+            </a:r>
+            <a:r>
+              <a:rPr lang="hu-HU" dirty="0" smtClean="0"/>
+              <a:t> </a:t>
+            </a:r>
+            <a:r>
+              <a:rPr lang="hu-HU" dirty="0" err="1" smtClean="0"/>
+              <a:t>which</a:t>
+            </a:r>
+            <a:r>
+              <a:rPr lang="hu-HU" dirty="0" smtClean="0"/>
+              <a:t> </a:t>
+            </a:r>
+            <a:r>
+              <a:rPr lang="hu-HU" dirty="0" err="1" smtClean="0"/>
+              <a:t>are</a:t>
+            </a:r>
+            <a:r>
+              <a:rPr lang="hu-HU" dirty="0" smtClean="0"/>
+              <a:t> </a:t>
+            </a:r>
+            <a:r>
+              <a:rPr lang="hu-HU" dirty="0" err="1" smtClean="0"/>
+              <a:t>not</a:t>
+            </a:r>
+            <a:r>
+              <a:rPr lang="hu-HU" dirty="0" smtClean="0"/>
+              <a:t> (</a:t>
+            </a:r>
+            <a:r>
+              <a:rPr lang="hu-HU" dirty="0" err="1" smtClean="0"/>
+              <a:t>demonstrative</a:t>
+            </a:r>
+            <a:r>
+              <a:rPr lang="hu-HU" dirty="0" smtClean="0"/>
+              <a:t>) </a:t>
+            </a:r>
+            <a:r>
+              <a:rPr lang="hu-HU" dirty="0" err="1" smtClean="0"/>
+              <a:t>pronouns</a:t>
+            </a:r>
+            <a:endParaRPr lang="hu-HU" dirty="0" smtClean="0"/>
+          </a:p>
+          <a:p>
+            <a:pPr lvl="1"/>
+            <a:r>
+              <a:rPr lang="hu-HU" dirty="0" err="1" smtClean="0"/>
+              <a:t>which</a:t>
+            </a:r>
+            <a:r>
+              <a:rPr lang="hu-HU" dirty="0" smtClean="0"/>
+              <a:t> </a:t>
+            </a:r>
+            <a:r>
+              <a:rPr lang="hu-HU" dirty="0" err="1" smtClean="0"/>
+              <a:t>nouns</a:t>
+            </a:r>
+            <a:r>
+              <a:rPr lang="hu-HU" dirty="0" smtClean="0"/>
+              <a:t> most </a:t>
+            </a:r>
+            <a:r>
+              <a:rPr lang="hu-HU" dirty="0" err="1" smtClean="0"/>
+              <a:t>frequently</a:t>
+            </a:r>
+            <a:r>
+              <a:rPr lang="hu-HU" dirty="0" smtClean="0"/>
+              <a:t> </a:t>
+            </a:r>
+            <a:r>
+              <a:rPr lang="hu-HU" dirty="0" err="1" smtClean="0"/>
+              <a:t>come</a:t>
+            </a:r>
+            <a:r>
+              <a:rPr lang="hu-HU" dirty="0" smtClean="0"/>
+              <a:t> </a:t>
+            </a:r>
+            <a:r>
+              <a:rPr lang="hu-HU" dirty="0" err="1" smtClean="0"/>
+              <a:t>after</a:t>
+            </a:r>
+            <a:r>
+              <a:rPr lang="hu-HU" dirty="0" smtClean="0"/>
+              <a:t> </a:t>
+            </a:r>
+            <a:r>
+              <a:rPr lang="hu-HU" dirty="0" err="1" smtClean="0"/>
+              <a:t>the</a:t>
+            </a:r>
+            <a:r>
+              <a:rPr lang="hu-HU" dirty="0" smtClean="0"/>
+              <a:t> </a:t>
+            </a:r>
+            <a:r>
+              <a:rPr lang="hu-HU" dirty="0" err="1" smtClean="0"/>
+              <a:t>adjective</a:t>
+            </a:r>
+            <a:r>
+              <a:rPr lang="hu-HU" dirty="0" smtClean="0"/>
+              <a:t> </a:t>
+            </a:r>
+            <a:r>
+              <a:rPr lang="hu-HU" i="1" dirty="0" err="1" smtClean="0"/>
+              <a:t>great</a:t>
+            </a:r>
+            <a:r>
+              <a:rPr lang="hu-HU" dirty="0" smtClean="0"/>
+              <a:t>?</a:t>
+            </a:r>
+          </a:p>
+          <a:p>
+            <a:r>
+              <a:rPr lang="hu-HU" dirty="0" err="1" smtClean="0"/>
+              <a:t>Get</a:t>
+            </a:r>
+            <a:r>
+              <a:rPr lang="hu-HU" dirty="0" smtClean="0"/>
+              <a:t> </a:t>
+            </a:r>
+            <a:r>
+              <a:rPr lang="hu-HU" dirty="0" err="1" smtClean="0"/>
+              <a:t>frequency</a:t>
+            </a:r>
+            <a:r>
+              <a:rPr lang="hu-HU" dirty="0" smtClean="0"/>
+              <a:t> </a:t>
+            </a:r>
+            <a:r>
+              <a:rPr lang="hu-HU" dirty="0" err="1" smtClean="0"/>
+              <a:t>list</a:t>
+            </a:r>
+            <a:r>
+              <a:rPr lang="hu-HU" dirty="0" smtClean="0"/>
+              <a:t> of </a:t>
+            </a:r>
+            <a:r>
+              <a:rPr lang="hu-HU" dirty="0" err="1" smtClean="0"/>
+              <a:t>all</a:t>
+            </a:r>
+            <a:r>
+              <a:rPr lang="hu-HU" dirty="0" smtClean="0"/>
+              <a:t> </a:t>
+            </a:r>
+            <a:r>
+              <a:rPr lang="hu-HU" dirty="0" err="1" smtClean="0"/>
+              <a:t>noun</a:t>
+            </a:r>
+            <a:r>
+              <a:rPr lang="hu-HU" dirty="0" smtClean="0"/>
+              <a:t> </a:t>
+            </a:r>
+            <a:r>
+              <a:rPr lang="hu-HU" dirty="0" err="1" smtClean="0"/>
+              <a:t>lemmata</a:t>
+            </a:r>
+            <a:r>
+              <a:rPr lang="hu-HU" dirty="0" smtClean="0"/>
+              <a:t> </a:t>
+            </a:r>
+            <a:r>
+              <a:rPr lang="hu-HU" dirty="0" err="1" smtClean="0"/>
+              <a:t>in</a:t>
+            </a:r>
+            <a:r>
+              <a:rPr lang="hu-HU" dirty="0" smtClean="0"/>
+              <a:t> corpus</a:t>
+            </a:r>
+          </a:p>
+          <a:p>
+            <a:r>
+              <a:rPr lang="hu-HU" dirty="0" err="1" smtClean="0"/>
+              <a:t>Find</a:t>
+            </a:r>
+            <a:r>
+              <a:rPr lang="hu-HU" dirty="0" smtClean="0"/>
+              <a:t> </a:t>
+            </a:r>
+            <a:r>
+              <a:rPr lang="hu-HU" dirty="0" err="1" smtClean="0"/>
+              <a:t>lemmata</a:t>
+            </a:r>
+            <a:r>
+              <a:rPr lang="hu-HU" dirty="0" smtClean="0"/>
+              <a:t> </a:t>
+            </a:r>
+            <a:r>
+              <a:rPr lang="hu-HU" dirty="0" err="1" smtClean="0"/>
+              <a:t>that</a:t>
+            </a:r>
+            <a:r>
+              <a:rPr lang="hu-HU" dirty="0" smtClean="0"/>
+              <a:t> </a:t>
+            </a:r>
+            <a:r>
+              <a:rPr lang="hu-HU" dirty="0" err="1" smtClean="0"/>
+              <a:t>are</a:t>
+            </a:r>
+            <a:r>
+              <a:rPr lang="hu-HU" dirty="0" smtClean="0"/>
+              <a:t> </a:t>
+            </a:r>
+            <a:r>
+              <a:rPr lang="hu-HU" dirty="0" err="1" smtClean="0"/>
+              <a:t>collocates</a:t>
+            </a:r>
+            <a:r>
+              <a:rPr lang="hu-HU" dirty="0" smtClean="0"/>
+              <a:t> of </a:t>
+            </a:r>
+            <a:r>
+              <a:rPr lang="hu-HU" dirty="0" err="1" smtClean="0"/>
+              <a:t>the</a:t>
+            </a:r>
+            <a:r>
+              <a:rPr lang="hu-HU" dirty="0" smtClean="0"/>
+              <a:t> </a:t>
+            </a:r>
+            <a:r>
+              <a:rPr lang="hu-HU" dirty="0" err="1" smtClean="0"/>
+              <a:t>noun</a:t>
+            </a:r>
+            <a:r>
+              <a:rPr lang="hu-HU" dirty="0" smtClean="0"/>
+              <a:t> </a:t>
+            </a:r>
+            <a:r>
+              <a:rPr lang="hu-HU" i="1" dirty="0" err="1" smtClean="0"/>
+              <a:t>hand</a:t>
+            </a:r>
+            <a:endParaRPr lang="hu-HU" i="1" dirty="0" smtClean="0"/>
+          </a:p>
+        </p:txBody>
+      </p:sp>
+    </p:spTree>
+    <p:extLst>
+      <p:ext uri="{BB962C8B-B14F-4D97-AF65-F5344CB8AC3E}">
+        <p14:creationId xmlns:p14="http://schemas.microsoft.com/office/powerpoint/2010/main" val="3438505066"/>
+      </p:ext>
+    </p:extLst>
+  </p:cSld>
+  <p:clrMapOvr>
+    <a:masterClrMapping/>
+  </p:clrMapOvr>
 </p:sld>
 </file>
 
